--- a/public/pitch/MyFlove_Pitchdeck_3.7.pptx
+++ b/public/pitch/MyFlove_Pitchdeck_3.7.pptx
@@ -3114,18 +3114,18 @@
         </p:nvSpPr>
         <p:spPr>
           <a:xfrm>
-            <a:off x="-411480" y="-411480"/>
-            <a:ext cx="2103120" cy="2103120"/>
+            <a:off x="11338560" y="6035040"/>
+            <a:ext cx="1463040" cy="1463040"/>
           </a:xfrm>
           <a:prstGeom prst="roundRect">
             <a:avLst/>
           </a:prstGeom>
           <a:solidFill>
-            <a:srgbClr val="7C5CE0"/>
+            <a:srgbClr val="3A2C5C"/>
           </a:solidFill>
           <a:ln>
             <a:solidFill>
-              <a:srgbClr val="7C5CE0"/>
+              <a:srgbClr val="3A2C5C"/>
             </a:solidFill>
           </a:ln>
         </p:spPr>
@@ -3151,54 +3151,9 @@
           </a:p>
         </p:txBody>
       </p:sp>
-      <p:sp>
-        <p:nvSpPr>
-          <p:cNvPr id="3" name="Rounded Rectangle 2"/>
-          <p:cNvSpPr/>
-          <p:nvPr/>
-        </p:nvSpPr>
-        <p:spPr>
-          <a:xfrm>
-            <a:off x="10881360" y="5577840"/>
-            <a:ext cx="1828800" cy="1828800"/>
-          </a:xfrm>
-          <a:prstGeom prst="roundRect">
-            <a:avLst/>
-          </a:prstGeom>
-          <a:solidFill>
-            <a:srgbClr val="F2A8CE"/>
-          </a:solidFill>
-          <a:ln>
-            <a:solidFill>
-              <a:srgbClr val="F2A8CE"/>
-            </a:solidFill>
-          </a:ln>
-        </p:spPr>
-        <p:style>
-          <a:lnRef idx="1">
-            <a:schemeClr val="accent1"/>
-          </a:lnRef>
-          <a:fillRef idx="3">
-            <a:schemeClr val="accent1"/>
-          </a:fillRef>
-          <a:effectRef idx="2">
-            <a:schemeClr val="accent1"/>
-          </a:effectRef>
-          <a:fontRef idx="minor">
-            <a:schemeClr val="lt1"/>
-          </a:fontRef>
-        </p:style>
-        <p:txBody>
-          <a:bodyPr rtlCol="0" anchor="ctr"/>
-          <a:lstStyle/>
-          <a:p>
-            <a:pPr algn="ctr"/>
-          </a:p>
-        </p:txBody>
-      </p:sp>
       <p:pic>
         <p:nvPicPr>
-          <p:cNvPr id="4" name="Picture 3" descr="flow-mascot.png"/>
+          <p:cNvPr id="3" name="Picture 2" descr="flow-mascot.png"/>
           <p:cNvPicPr>
             <a:picLocks noChangeAspect="1"/>
           </p:cNvPicPr>
@@ -3222,7 +3177,7 @@
       </p:pic>
       <p:sp>
         <p:nvSpPr>
-          <p:cNvPr id="5" name="TextBox 4"/>
+          <p:cNvPr id="4" name="TextBox 3"/>
           <p:cNvSpPr txBox="1"/>
           <p:nvPr/>
         </p:nvSpPr>
@@ -3257,7 +3212,7 @@
       </p:sp>
       <p:sp>
         <p:nvSpPr>
-          <p:cNvPr id="6" name="TextBox 5"/>
+          <p:cNvPr id="5" name="TextBox 4"/>
           <p:cNvSpPr txBox="1"/>
           <p:nvPr/>
         </p:nvSpPr>
@@ -3293,7 +3248,7 @@
       </p:sp>
       <p:sp>
         <p:nvSpPr>
-          <p:cNvPr id="7" name="TextBox 6"/>
+          <p:cNvPr id="6" name="TextBox 5"/>
           <p:cNvSpPr txBox="1"/>
           <p:nvPr/>
         </p:nvSpPr>
@@ -3328,7 +3283,7 @@
       </p:sp>
       <p:sp>
         <p:nvSpPr>
-          <p:cNvPr id="8" name="TextBox 7"/>
+          <p:cNvPr id="7" name="TextBox 6"/>
           <p:cNvSpPr txBox="1"/>
           <p:nvPr/>
         </p:nvSpPr>
@@ -3397,18 +3352,18 @@
         </p:nvSpPr>
         <p:spPr>
           <a:xfrm>
-            <a:off x="-411480" y="-411480"/>
-            <a:ext cx="2103120" cy="2103120"/>
+            <a:off x="-548640" y="-548640"/>
+            <a:ext cx="1737360" cy="1737360"/>
           </a:xfrm>
           <a:prstGeom prst="roundRect">
             <a:avLst/>
           </a:prstGeom>
           <a:solidFill>
-            <a:srgbClr val="7C5CE0"/>
+            <a:srgbClr val="E9E0FB"/>
           </a:solidFill>
           <a:ln>
             <a:solidFill>
-              <a:srgbClr val="7C5CE0"/>
+              <a:srgbClr val="E9E0FB"/>
             </a:solidFill>
           </a:ln>
         </p:spPr>
@@ -3442,18 +3397,18 @@
         </p:nvSpPr>
         <p:spPr>
           <a:xfrm>
-            <a:off x="10881360" y="5577840"/>
-            <a:ext cx="1828800" cy="1828800"/>
+            <a:off x="11247120" y="5943600"/>
+            <a:ext cx="1554480" cy="1554480"/>
           </a:xfrm>
           <a:prstGeom prst="roundRect">
             <a:avLst/>
           </a:prstGeom>
           <a:solidFill>
-            <a:srgbClr val="F2A8CE"/>
+            <a:srgbClr val="FAE5F0"/>
           </a:solidFill>
           <a:ln>
             <a:solidFill>
-              <a:srgbClr val="F2A8CE"/>
+              <a:srgbClr val="FAE5F0"/>
             </a:solidFill>
           </a:ln>
         </p:spPr>
@@ -4293,18 +4248,18 @@
         </p:nvSpPr>
         <p:spPr>
           <a:xfrm>
-            <a:off x="-411480" y="-411480"/>
-            <a:ext cx="2103120" cy="2103120"/>
+            <a:off x="11338560" y="6035040"/>
+            <a:ext cx="1463040" cy="1463040"/>
           </a:xfrm>
           <a:prstGeom prst="roundRect">
             <a:avLst/>
           </a:prstGeom>
           <a:solidFill>
-            <a:srgbClr val="7C5CE0"/>
+            <a:srgbClr val="3A2C5C"/>
           </a:solidFill>
           <a:ln>
             <a:solidFill>
-              <a:srgbClr val="7C5CE0"/>
+              <a:srgbClr val="3A2C5C"/>
             </a:solidFill>
           </a:ln>
         </p:spPr>
@@ -4330,54 +4285,9 @@
           </a:p>
         </p:txBody>
       </p:sp>
-      <p:sp>
-        <p:nvSpPr>
-          <p:cNvPr id="3" name="Rounded Rectangle 2"/>
-          <p:cNvSpPr/>
-          <p:nvPr/>
-        </p:nvSpPr>
-        <p:spPr>
-          <a:xfrm>
-            <a:off x="10881360" y="5577840"/>
-            <a:ext cx="1828800" cy="1828800"/>
-          </a:xfrm>
-          <a:prstGeom prst="roundRect">
-            <a:avLst/>
-          </a:prstGeom>
-          <a:solidFill>
-            <a:srgbClr val="F2A8CE"/>
-          </a:solidFill>
-          <a:ln>
-            <a:solidFill>
-              <a:srgbClr val="F2A8CE"/>
-            </a:solidFill>
-          </a:ln>
-        </p:spPr>
-        <p:style>
-          <a:lnRef idx="1">
-            <a:schemeClr val="accent1"/>
-          </a:lnRef>
-          <a:fillRef idx="3">
-            <a:schemeClr val="accent1"/>
-          </a:fillRef>
-          <a:effectRef idx="2">
-            <a:schemeClr val="accent1"/>
-          </a:effectRef>
-          <a:fontRef idx="minor">
-            <a:schemeClr val="lt1"/>
-          </a:fontRef>
-        </p:style>
-        <p:txBody>
-          <a:bodyPr rtlCol="0" anchor="ctr"/>
-          <a:lstStyle/>
-          <a:p>
-            <a:pPr algn="ctr"/>
-          </a:p>
-        </p:txBody>
-      </p:sp>
       <p:pic>
         <p:nvPicPr>
-          <p:cNvPr id="4" name="Picture 3" descr="flow-mascot.png"/>
+          <p:cNvPr id="3" name="Picture 2" descr="flow-mascot.png"/>
           <p:cNvPicPr>
             <a:picLocks noChangeAspect="1"/>
           </p:cNvPicPr>
@@ -4401,7 +4311,7 @@
       </p:pic>
       <p:sp>
         <p:nvSpPr>
-          <p:cNvPr id="5" name="TextBox 4"/>
+          <p:cNvPr id="4" name="TextBox 3"/>
           <p:cNvSpPr txBox="1"/>
           <p:nvPr/>
         </p:nvSpPr>
@@ -4436,7 +4346,7 @@
       </p:sp>
       <p:sp>
         <p:nvSpPr>
-          <p:cNvPr id="6" name="TextBox 5"/>
+          <p:cNvPr id="5" name="TextBox 4"/>
           <p:cNvSpPr txBox="1"/>
           <p:nvPr/>
         </p:nvSpPr>
@@ -4472,7 +4382,7 @@
       </p:sp>
       <p:sp>
         <p:nvSpPr>
-          <p:cNvPr id="7" name="TextBox 6"/>
+          <p:cNvPr id="6" name="TextBox 5"/>
           <p:cNvSpPr txBox="1"/>
           <p:nvPr/>
         </p:nvSpPr>
@@ -4507,7 +4417,7 @@
       </p:sp>
       <p:sp>
         <p:nvSpPr>
-          <p:cNvPr id="8" name="TextBox 7"/>
+          <p:cNvPr id="7" name="TextBox 6"/>
           <p:cNvSpPr txBox="1"/>
           <p:nvPr/>
         </p:nvSpPr>
@@ -4574,18 +4484,18 @@
         </p:nvSpPr>
         <p:spPr>
           <a:xfrm>
-            <a:off x="-411480" y="-411480"/>
-            <a:ext cx="2103120" cy="2103120"/>
+            <a:off x="-548640" y="-548640"/>
+            <a:ext cx="1737360" cy="1737360"/>
           </a:xfrm>
           <a:prstGeom prst="roundRect">
             <a:avLst/>
           </a:prstGeom>
           <a:solidFill>
-            <a:srgbClr val="7C5CE0"/>
+            <a:srgbClr val="E9E0FB"/>
           </a:solidFill>
           <a:ln>
             <a:solidFill>
-              <a:srgbClr val="7C5CE0"/>
+              <a:srgbClr val="E9E0FB"/>
             </a:solidFill>
           </a:ln>
         </p:spPr>
@@ -4619,18 +4529,18 @@
         </p:nvSpPr>
         <p:spPr>
           <a:xfrm>
-            <a:off x="10881360" y="5577840"/>
-            <a:ext cx="1828800" cy="1828800"/>
+            <a:off x="11247120" y="5943600"/>
+            <a:ext cx="1554480" cy="1554480"/>
           </a:xfrm>
           <a:prstGeom prst="roundRect">
             <a:avLst/>
           </a:prstGeom>
           <a:solidFill>
-            <a:srgbClr val="F2A8CE"/>
+            <a:srgbClr val="FAE5F0"/>
           </a:solidFill>
           <a:ln>
             <a:solidFill>
-              <a:srgbClr val="F2A8CE"/>
+              <a:srgbClr val="FAE5F0"/>
             </a:solidFill>
           </a:ln>
         </p:spPr>
@@ -5275,18 +5185,18 @@
         </p:nvSpPr>
         <p:spPr>
           <a:xfrm>
-            <a:off x="-411480" y="-411480"/>
-            <a:ext cx="2103120" cy="2103120"/>
+            <a:off x="-548640" y="-548640"/>
+            <a:ext cx="1737360" cy="1737360"/>
           </a:xfrm>
           <a:prstGeom prst="roundRect">
             <a:avLst/>
           </a:prstGeom>
           <a:solidFill>
-            <a:srgbClr val="7C5CE0"/>
+            <a:srgbClr val="E9E0FB"/>
           </a:solidFill>
           <a:ln>
             <a:solidFill>
-              <a:srgbClr val="7C5CE0"/>
+              <a:srgbClr val="E9E0FB"/>
             </a:solidFill>
           </a:ln>
         </p:spPr>
@@ -5320,18 +5230,18 @@
         </p:nvSpPr>
         <p:spPr>
           <a:xfrm>
-            <a:off x="10881360" y="5577840"/>
-            <a:ext cx="1828800" cy="1828800"/>
+            <a:off x="11247120" y="5943600"/>
+            <a:ext cx="1554480" cy="1554480"/>
           </a:xfrm>
           <a:prstGeom prst="roundRect">
             <a:avLst/>
           </a:prstGeom>
           <a:solidFill>
-            <a:srgbClr val="F2A8CE"/>
+            <a:srgbClr val="FAE5F0"/>
           </a:solidFill>
           <a:ln>
             <a:solidFill>
-              <a:srgbClr val="F2A8CE"/>
+              <a:srgbClr val="FAE5F0"/>
             </a:solidFill>
           </a:ln>
         </p:spPr>
@@ -5576,18 +5486,18 @@
         </p:nvSpPr>
         <p:spPr>
           <a:xfrm>
-            <a:off x="-411480" y="-411480"/>
-            <a:ext cx="2103120" cy="2103120"/>
+            <a:off x="-548640" y="-548640"/>
+            <a:ext cx="1737360" cy="1737360"/>
           </a:xfrm>
           <a:prstGeom prst="roundRect">
             <a:avLst/>
           </a:prstGeom>
           <a:solidFill>
-            <a:srgbClr val="7C5CE0"/>
+            <a:srgbClr val="E9E0FB"/>
           </a:solidFill>
           <a:ln>
             <a:solidFill>
-              <a:srgbClr val="7C5CE0"/>
+              <a:srgbClr val="E9E0FB"/>
             </a:solidFill>
           </a:ln>
         </p:spPr>
@@ -5621,18 +5531,18 @@
         </p:nvSpPr>
         <p:spPr>
           <a:xfrm>
-            <a:off x="10881360" y="5577840"/>
-            <a:ext cx="1828800" cy="1828800"/>
+            <a:off x="11247120" y="5943600"/>
+            <a:ext cx="1554480" cy="1554480"/>
           </a:xfrm>
           <a:prstGeom prst="roundRect">
             <a:avLst/>
           </a:prstGeom>
           <a:solidFill>
-            <a:srgbClr val="F2A8CE"/>
+            <a:srgbClr val="FAE5F0"/>
           </a:solidFill>
           <a:ln>
             <a:solidFill>
-              <a:srgbClr val="F2A8CE"/>
+              <a:srgbClr val="FAE5F0"/>
             </a:solidFill>
           </a:ln>
         </p:spPr>
@@ -6242,18 +6152,18 @@
         </p:nvSpPr>
         <p:spPr>
           <a:xfrm>
-            <a:off x="-411480" y="-411480"/>
-            <a:ext cx="2103120" cy="2103120"/>
+            <a:off x="-548640" y="-548640"/>
+            <a:ext cx="1737360" cy="1737360"/>
           </a:xfrm>
           <a:prstGeom prst="roundRect">
             <a:avLst/>
           </a:prstGeom>
           <a:solidFill>
-            <a:srgbClr val="7C5CE0"/>
+            <a:srgbClr val="E9E0FB"/>
           </a:solidFill>
           <a:ln>
             <a:solidFill>
-              <a:srgbClr val="7C5CE0"/>
+              <a:srgbClr val="E9E0FB"/>
             </a:solidFill>
           </a:ln>
         </p:spPr>
@@ -6287,18 +6197,18 @@
         </p:nvSpPr>
         <p:spPr>
           <a:xfrm>
-            <a:off x="10881360" y="5577840"/>
-            <a:ext cx="1828800" cy="1828800"/>
+            <a:off x="11247120" y="5943600"/>
+            <a:ext cx="1554480" cy="1554480"/>
           </a:xfrm>
           <a:prstGeom prst="roundRect">
             <a:avLst/>
           </a:prstGeom>
           <a:solidFill>
-            <a:srgbClr val="F2A8CE"/>
+            <a:srgbClr val="FAE5F0"/>
           </a:solidFill>
           <a:ln>
             <a:solidFill>
-              <a:srgbClr val="F2A8CE"/>
+              <a:srgbClr val="FAE5F0"/>
             </a:solidFill>
           </a:ln>
         </p:spPr>
@@ -7028,18 +6938,18 @@
         </p:nvSpPr>
         <p:spPr>
           <a:xfrm>
-            <a:off x="-411480" y="-411480"/>
-            <a:ext cx="2103120" cy="2103120"/>
+            <a:off x="-548640" y="-548640"/>
+            <a:ext cx="1737360" cy="1737360"/>
           </a:xfrm>
           <a:prstGeom prst="roundRect">
             <a:avLst/>
           </a:prstGeom>
           <a:solidFill>
-            <a:srgbClr val="7C5CE0"/>
+            <a:srgbClr val="E9E0FB"/>
           </a:solidFill>
           <a:ln>
             <a:solidFill>
-              <a:srgbClr val="7C5CE0"/>
+              <a:srgbClr val="E9E0FB"/>
             </a:solidFill>
           </a:ln>
         </p:spPr>
@@ -7073,18 +6983,18 @@
         </p:nvSpPr>
         <p:spPr>
           <a:xfrm>
-            <a:off x="10881360" y="5577840"/>
-            <a:ext cx="1828800" cy="1828800"/>
+            <a:off x="11247120" y="5943600"/>
+            <a:ext cx="1554480" cy="1554480"/>
           </a:xfrm>
           <a:prstGeom prst="roundRect">
             <a:avLst/>
           </a:prstGeom>
           <a:solidFill>
-            <a:srgbClr val="F2A8CE"/>
+            <a:srgbClr val="FAE5F0"/>
           </a:solidFill>
           <a:ln>
             <a:solidFill>
-              <a:srgbClr val="F2A8CE"/>
+              <a:srgbClr val="FAE5F0"/>
             </a:solidFill>
           </a:ln>
         </p:spPr>
@@ -7569,18 +7479,18 @@
         </p:nvSpPr>
         <p:spPr>
           <a:xfrm>
-            <a:off x="-411480" y="-411480"/>
-            <a:ext cx="2103120" cy="2103120"/>
+            <a:off x="-548640" y="-548640"/>
+            <a:ext cx="1737360" cy="1737360"/>
           </a:xfrm>
           <a:prstGeom prst="roundRect">
             <a:avLst/>
           </a:prstGeom>
           <a:solidFill>
-            <a:srgbClr val="7C5CE0"/>
+            <a:srgbClr val="E9E0FB"/>
           </a:solidFill>
           <a:ln>
             <a:solidFill>
-              <a:srgbClr val="7C5CE0"/>
+              <a:srgbClr val="E9E0FB"/>
             </a:solidFill>
           </a:ln>
         </p:spPr>
@@ -7614,18 +7524,18 @@
         </p:nvSpPr>
         <p:spPr>
           <a:xfrm>
-            <a:off x="10881360" y="5577840"/>
-            <a:ext cx="1828800" cy="1828800"/>
+            <a:off x="11247120" y="5943600"/>
+            <a:ext cx="1554480" cy="1554480"/>
           </a:xfrm>
           <a:prstGeom prst="roundRect">
             <a:avLst/>
           </a:prstGeom>
           <a:solidFill>
-            <a:srgbClr val="F2A8CE"/>
+            <a:srgbClr val="FAE5F0"/>
           </a:solidFill>
           <a:ln>
             <a:solidFill>
-              <a:srgbClr val="F2A8CE"/>
+              <a:srgbClr val="FAE5F0"/>
             </a:solidFill>
           </a:ln>
         </p:spPr>
@@ -8134,18 +8044,18 @@
         </p:nvSpPr>
         <p:spPr>
           <a:xfrm>
-            <a:off x="-411480" y="-411480"/>
-            <a:ext cx="2103120" cy="2103120"/>
+            <a:off x="-548640" y="-548640"/>
+            <a:ext cx="1737360" cy="1737360"/>
           </a:xfrm>
           <a:prstGeom prst="roundRect">
             <a:avLst/>
           </a:prstGeom>
           <a:solidFill>
-            <a:srgbClr val="7C5CE0"/>
+            <a:srgbClr val="E9E0FB"/>
           </a:solidFill>
           <a:ln>
             <a:solidFill>
-              <a:srgbClr val="7C5CE0"/>
+              <a:srgbClr val="E9E0FB"/>
             </a:solidFill>
           </a:ln>
         </p:spPr>
@@ -8179,18 +8089,18 @@
         </p:nvSpPr>
         <p:spPr>
           <a:xfrm>
-            <a:off x="10881360" y="5577840"/>
-            <a:ext cx="1828800" cy="1828800"/>
+            <a:off x="11247120" y="5943600"/>
+            <a:ext cx="1554480" cy="1554480"/>
           </a:xfrm>
           <a:prstGeom prst="roundRect">
             <a:avLst/>
           </a:prstGeom>
           <a:solidFill>
-            <a:srgbClr val="F2A8CE"/>
+            <a:srgbClr val="FAE5F0"/>
           </a:solidFill>
           <a:ln>
             <a:solidFill>
-              <a:srgbClr val="F2A8CE"/>
+              <a:srgbClr val="FAE5F0"/>
             </a:solidFill>
           </a:ln>
         </p:spPr>
@@ -8835,18 +8745,18 @@
         </p:nvSpPr>
         <p:spPr>
           <a:xfrm>
-            <a:off x="-411480" y="-411480"/>
-            <a:ext cx="2103120" cy="2103120"/>
+            <a:off x="-548640" y="-548640"/>
+            <a:ext cx="1737360" cy="1737360"/>
           </a:xfrm>
           <a:prstGeom prst="roundRect">
             <a:avLst/>
           </a:prstGeom>
           <a:solidFill>
-            <a:srgbClr val="7C5CE0"/>
+            <a:srgbClr val="E9E0FB"/>
           </a:solidFill>
           <a:ln>
             <a:solidFill>
-              <a:srgbClr val="7C5CE0"/>
+              <a:srgbClr val="E9E0FB"/>
             </a:solidFill>
           </a:ln>
         </p:spPr>
@@ -8880,18 +8790,18 @@
         </p:nvSpPr>
         <p:spPr>
           <a:xfrm>
-            <a:off x="10881360" y="5577840"/>
-            <a:ext cx="1828800" cy="1828800"/>
+            <a:off x="11247120" y="5943600"/>
+            <a:ext cx="1554480" cy="1554480"/>
           </a:xfrm>
           <a:prstGeom prst="roundRect">
             <a:avLst/>
           </a:prstGeom>
           <a:solidFill>
-            <a:srgbClr val="F2A8CE"/>
+            <a:srgbClr val="FAE5F0"/>
           </a:solidFill>
           <a:ln>
             <a:solidFill>
-              <a:srgbClr val="F2A8CE"/>
+              <a:srgbClr val="FAE5F0"/>
             </a:solidFill>
           </a:ln>
         </p:spPr>
